--- a/form.pptx
+++ b/form.pptx
@@ -3012,22 +3012,22 @@
           <a:lstStyle/>
           <a:p>
             <a:r>
-              <a:t>질병 3%  : </a:t>
-            </a:r>
-          </a:p>
-          <a:p>
-            <a:r>
-              <a:t>질병 80%  : </a:t>
-            </a:r>
-          </a:p>
-          <a:p>
-            <a:r>
-              <a:t>상해3%  : </a:t>
-            </a:r>
-          </a:p>
-          <a:p>
-            <a:r>
-              <a:t>상해 80%  : </a:t>
+              <a:t>질병 3% : 미가입</a:t>
+            </a:r>
+          </a:p>
+          <a:p>
+            <a:r>
+              <a:t>질병 80% : 미가입</a:t>
+            </a:r>
+          </a:p>
+          <a:p>
+            <a:r>
+              <a:t>상해3% : 미가입</a:t>
+            </a:r>
+          </a:p>
+          <a:p>
+            <a:r>
+              <a:t>상해 80% : 미가입</a:t>
             </a:r>
           </a:p>
           <a:p>
@@ -3070,32 +3070,32 @@
           <a:lstStyle/>
           <a:p>
             <a:r>
-              <a:t>대인  : </a:t>
-            </a:r>
-          </a:p>
-          <a:p>
-            <a:r>
-              <a:t>대물  : </a:t>
-            </a:r>
-          </a:p>
-          <a:p>
-            <a:r>
-              <a:t>합의금  : </a:t>
-            </a:r>
-          </a:p>
-          <a:p>
-            <a:r>
-              <a:t>6주미만  : </a:t>
-            </a:r>
-          </a:p>
-          <a:p>
-            <a:r>
-              <a:t>변호사비  : </a:t>
-            </a:r>
-          </a:p>
-          <a:p>
-            <a:r>
-              <a:t>자부상  : </a:t>
+              <a:t>대인 : 7천만</a:t>
+            </a:r>
+          </a:p>
+          <a:p>
+            <a:r>
+              <a:t>대물 : 1500만</a:t>
+            </a:r>
+          </a:p>
+          <a:p>
+            <a:r>
+              <a:t>합의금 : 5억2천만</a:t>
+            </a:r>
+          </a:p>
+          <a:p>
+            <a:r>
+              <a:t>6주미만 : 미가입</a:t>
+            </a:r>
+          </a:p>
+          <a:p>
+            <a:r>
+              <a:t>변호사비 : 1억5천만</a:t>
+            </a:r>
+          </a:p>
+          <a:p>
+            <a:r>
+              <a:t>자부상 : 60만</a:t>
             </a:r>
           </a:p>
         </p:txBody>
@@ -3132,22 +3132,22 @@
           <a:lstStyle/>
           <a:p>
             <a:r>
-              <a:t>치매  : </a:t>
-            </a:r>
-          </a:p>
-          <a:p>
-            <a:r>
-              <a:t>재가  : </a:t>
-            </a:r>
-          </a:p>
-          <a:p>
-            <a:r>
-              <a:t>노치원  : </a:t>
-            </a:r>
-          </a:p>
-          <a:p>
-            <a:r>
-              <a:t>시설  : </a:t>
+              <a:t>치매 : 미가입</a:t>
+            </a:r>
+          </a:p>
+          <a:p>
+            <a:r>
+              <a:t>재가 : 미가입</a:t>
+            </a:r>
+          </a:p>
+          <a:p>
+            <a:r>
+              <a:t>노치원 : 미가입</a:t>
+            </a:r>
+          </a:p>
+          <a:p>
+            <a:r>
+              <a:t>시설 : 미가입</a:t>
             </a:r>
           </a:p>
         </p:txBody>
@@ -3184,22 +3184,22 @@
           <a:lstStyle/>
           <a:p>
             <a:r>
-              <a:t>크라운  : </a:t>
-            </a:r>
-          </a:p>
-          <a:p>
-            <a:r>
-              <a:t>임플란트  : </a:t>
-            </a:r>
-          </a:p>
-          <a:p>
-            <a:r>
-              <a:t>기타  : </a:t>
-            </a:r>
-          </a:p>
-          <a:p>
-            <a:r>
-              <a:t>화재보험  : </a:t>
+              <a:t>크라운 : 미가입</a:t>
+            </a:r>
+          </a:p>
+          <a:p>
+            <a:r>
+              <a:t>임플란트 : 미가입</a:t>
+            </a:r>
+          </a:p>
+          <a:p>
+            <a:r>
+              <a:t>기타 : 미가입</a:t>
+            </a:r>
+          </a:p>
+          <a:p>
+            <a:r>
+              <a:t>화재보험 : 미가입</a:t>
             </a:r>
           </a:p>
         </p:txBody>
@@ -3672,14 +3672,7 @@
             <a:lstStyle/>
             <a:p>
               <a:r>
-                <a:rPr lang="ko-KR" altLang="en-US" sz="2000" dirty="0">
-                  <a:solidFill>
-                    <a:srgbClr val="000000"/>
-                  </a:solidFill>
-                  <a:latin typeface="HY엽서M" panose="02030600000101010101" pitchFamily="18" charset="-127"/>
-                  <a:ea typeface="HY엽서M" panose="02030600000101010101" pitchFamily="18" charset="-127"/>
-                </a:rPr>
-                <a:t>허정원님의 보장</a:t>
+                <a:t>*님의 보장</a:t>
               </a:r>
             </a:p>
           </p:txBody>
@@ -4501,21 +4494,19 @@
             </a:ln>
           </p:spPr>
           <p:txBody>
-            <a:bodyPr wrap="square" rtlCol="0">
+            <a:bodyPr wrap="none" rtlCol="0" anchor="ctr">
               <a:normAutofit/>
             </a:bodyPr>
             <a:lstStyle/>
             <a:p>
               <a:pPr algn="ctr"/>
               <a:r>
-                <a:rPr lang="ko-KR" altLang="en-US" sz="1100" dirty="0">
+                <a:rPr sz="1200" b="1">
                   <a:solidFill>
-                    <a:srgbClr val="000000"/>
+                    <a:srgbClr val="222222"/>
                   </a:solidFill>
-                  <a:latin typeface="HY엽서M" panose="02030600000101010101" pitchFamily="18" charset="-127"/>
-                  <a:ea typeface="HY엽서M" panose="02030600000101010101" pitchFamily="18" charset="-127"/>
                 </a:rPr>
-                <a:t>뇌출혈</a:t>
+                <a:t>1천만</a:t>
               </a:r>
             </a:p>
           </p:txBody>
@@ -4554,17 +4545,17 @@
             <a:lstStyle/>
             <a:p>
               <a:r>
-                <a:t>산정특례(뇌혈관)  : </a:t>
-              </a:r>
-            </a:p>
-            <a:p>
-              <a:r>
-                <a:t>혈전용해치료비  : </a:t>
-              </a:r>
-            </a:p>
-            <a:p>
-              <a:r>
-                <a:t>2대주요치료비  : </a:t>
+                <a:t>산정특례(뇌혈관) : 미가입</a:t>
+              </a:r>
+            </a:p>
+            <a:p>
+              <a:r>
+                <a:t>혈전용해치료비 : 미가입</a:t>
+              </a:r>
+            </a:p>
+            <a:p>
+              <a:r>
+                <a:t>2대주요치료비 : 미가입</a:t>
               </a:r>
             </a:p>
           </p:txBody>
@@ -4744,17 +4735,17 @@
             <a:lstStyle/>
             <a:p>
               <a:r>
-                <a:t>산정특례(심장)  : </a:t>
-              </a:r>
-            </a:p>
-            <a:p>
-              <a:r>
-                <a:t>혈전용해치료비  : </a:t>
-              </a:r>
-            </a:p>
-            <a:p>
-              <a:r>
-                <a:t>2대주요치료비  : </a:t>
+                <a:t>산정특례(심장) : 미가입</a:t>
+              </a:r>
+            </a:p>
+            <a:p>
+              <a:r>
+                <a:t>혈전용해치료비 : 미가입</a:t>
+              </a:r>
+            </a:p>
+            <a:p>
+              <a:r>
+                <a:t>2대주요치료비 : 미가입</a:t>
               </a:r>
             </a:p>
           </p:txBody>
@@ -4793,7 +4784,7 @@
             <a:lstStyle/>
             <a:p>
               <a:r>
-                <a:t>암주요(고액)  : </a:t>
+                <a:t>암주요(고액) : 미가입</a:t>
               </a:r>
             </a:p>
           </p:txBody>
@@ -5904,7 +5895,7 @@
             <a:lstStyle/>
             <a:p>
               <a:r>
-                <a:t>일상배상책임  : </a:t>
+                <a:t>일상배상책임 : 2억</a:t>
               </a:r>
             </a:p>
           </p:txBody>
@@ -5943,27 +5934,27 @@
             <a:lstStyle/>
             <a:p>
               <a:r>
-                <a:t>입원  : </a:t>
-              </a:r>
-            </a:p>
-            <a:p>
-              <a:r>
-                <a:t>통원  : </a:t>
-              </a:r>
-            </a:p>
-            <a:p>
-              <a:r>
-                <a:t>MRI  : </a:t>
-              </a:r>
-            </a:p>
-            <a:p>
-              <a:r>
-                <a:t>도수치료  : </a:t>
-              </a:r>
-            </a:p>
-            <a:p>
-              <a:r>
-                <a:t>비급여주사  : </a:t>
+                <a:t>입원 : 미가입</a:t>
+              </a:r>
+            </a:p>
+            <a:p>
+              <a:r>
+                <a:t>통원 : 미가입</a:t>
+              </a:r>
+            </a:p>
+            <a:p>
+              <a:r>
+                <a:t>MRI : 미가입</a:t>
+              </a:r>
+            </a:p>
+            <a:p>
+              <a:r>
+                <a:t>도수치료 : 미가입</a:t>
+              </a:r>
+            </a:p>
+            <a:p>
+              <a:r>
+                <a:t>비급여주사 : 미가입</a:t>
               </a:r>
             </a:p>
           </p:txBody>
@@ -6002,37 +5993,37 @@
             <a:lstStyle/>
             <a:p>
               <a:r>
-                <a:t>골절  : </a:t>
-              </a:r>
-            </a:p>
-            <a:p>
-              <a:r>
-                <a:t>5대골절  : </a:t>
-              </a:r>
-            </a:p>
-            <a:p>
-              <a:r>
-                <a:t>화상  : </a:t>
-              </a:r>
-            </a:p>
-            <a:p>
-              <a:r>
-                <a:t>중대화상  : </a:t>
-              </a:r>
-            </a:p>
-            <a:p>
-              <a:r>
-                <a:t>반깁스  : </a:t>
-              </a:r>
-            </a:p>
-            <a:p>
-              <a:r>
-                <a:t>깁스  : </a:t>
-              </a:r>
-            </a:p>
-            <a:p>
-              <a:r>
-                <a:t>응급실  : </a:t>
+                <a:t>골절 : 142만</a:t>
+              </a:r>
+            </a:p>
+            <a:p>
+              <a:r>
+                <a:t>5대골절 : 미가입</a:t>
+              </a:r>
+            </a:p>
+            <a:p>
+              <a:r>
+                <a:t>화상 : 미가입</a:t>
+              </a:r>
+            </a:p>
+            <a:p>
+              <a:r>
+                <a:t>중대화상 : 미가입</a:t>
+              </a:r>
+            </a:p>
+            <a:p>
+              <a:r>
+                <a:t>반깁스 : 미가입</a:t>
+              </a:r>
+            </a:p>
+            <a:p>
+              <a:r>
+                <a:t>깁스 : 130만</a:t>
+              </a:r>
+            </a:p>
+            <a:p>
+              <a:r>
+                <a:t>응급실 : 82만</a:t>
               </a:r>
             </a:p>
           </p:txBody>
@@ -6076,17 +6067,17 @@
             </a:p>
             <a:p>
               <a:r>
-                <a:t>- ___세  : </a:t>
-              </a:r>
-            </a:p>
-            <a:p>
-              <a:r>
-                <a:t>80세  : </a:t>
-              </a:r>
-            </a:p>
-            <a:p>
-              <a:r>
-                <a:t>종신  : </a:t>
+                <a:t>- ___세 : 2억</a:t>
+              </a:r>
+            </a:p>
+            <a:p>
+              <a:r>
+                <a:t>80세 : 미가입</a:t>
+              </a:r>
+            </a:p>
+            <a:p>
+              <a:r>
+                <a:t>종신 : 9999만</a:t>
               </a:r>
             </a:p>
           </p:txBody>
@@ -6125,7 +6116,7 @@
             <a:lstStyle/>
             <a:p>
               <a:r>
-                <a:t>상해사망  : </a:t>
+                <a:t>상해사망 : 8억2천만</a:t>
               </a:r>
             </a:p>
           </p:txBody>
@@ -6164,43 +6155,43 @@
             <a:lstStyle/>
             <a:p>
               <a:r>
-                <a:t>암진단비  : </a:t>
-              </a:r>
-            </a:p>
-            <a:p>
-              <a:r>
-                <a:t>유사암  : </a:t>
-              </a:r>
-            </a:p>
-            <a:p>
-              <a:r>
-                <a:t>통합암  : </a:t>
-              </a:r>
-            </a:p>
-            <a:p>
-              <a:r>
-                <a:t>전이암  : </a:t>
+                <a:t>암진단비 : 1억7천만</a:t>
+              </a:r>
+            </a:p>
+            <a:p>
+              <a:r>
+                <a:t>유사암 : 미가입</a:t>
+              </a:r>
+            </a:p>
+            <a:p>
+              <a:r>
+                <a:t>통합암 : 미가입</a:t>
+              </a:r>
+            </a:p>
+            <a:p>
+              <a:r>
+                <a:t>전이암 : 8100만</a:t>
               </a:r>
             </a:p>
             <a:p/>
             <a:p>
               <a:r>
-                <a:t>항암치료  : </a:t>
-              </a:r>
-            </a:p>
-            <a:p>
-              <a:r>
-                <a:t>표적/양성자.세기  : </a:t>
-              </a:r>
-            </a:p>
-            <a:p>
-              <a:r>
-                <a:t>암통원비  : </a:t>
-              </a:r>
-            </a:p>
-            <a:p>
-              <a:r>
-                <a:t>다빈치  : </a:t>
+                <a:t>항암치료 : 1억3천만</a:t>
+              </a:r>
+            </a:p>
+            <a:p>
+              <a:r>
+                <a:t>표적/양성자.세기 : 미가입</a:t>
+              </a:r>
+            </a:p>
+            <a:p>
+              <a:r>
+                <a:t>암통원비 : 미가입</a:t>
+              </a:r>
+            </a:p>
+            <a:p>
+              <a:r>
+                <a:t>다빈치 : 미가입</a:t>
               </a:r>
             </a:p>
           </p:txBody>
@@ -6239,7 +6230,7 @@
             <a:lstStyle/>
             <a:p>
               <a:r>
-                <a:t>질병수술  : </a:t>
+                <a:t>질병수술 : 110만</a:t>
               </a:r>
             </a:p>
             <a:p>
@@ -6254,37 +6245,37 @@
             </a:p>
             <a:p>
               <a:r>
-                <a:t>119대 수술  : </a:t>
-              </a:r>
-            </a:p>
-            <a:p>
-              <a:r>
-                <a:t>뇌혈관수술  : </a:t>
-              </a:r>
-            </a:p>
-            <a:p>
-              <a:r>
-                <a:t>허혈성수술  : </a:t>
-              </a:r>
-            </a:p>
-            <a:p>
-              <a:r>
-                <a:t>심장 수술  : </a:t>
-              </a:r>
-            </a:p>
-            <a:p>
-              <a:r>
-                <a:t>5대기관수술  : </a:t>
-              </a:r>
-            </a:p>
-            <a:p>
-              <a:r>
-                <a:t>7대 수술  : </a:t>
-              </a:r>
-            </a:p>
-            <a:p>
-              <a:r>
-                <a:t>______수술  : </a:t>
+                <a:t>119대 수술 : 미가입</a:t>
+              </a:r>
+            </a:p>
+            <a:p>
+              <a:r>
+                <a:t>뇌혈관수술 : 1200만</a:t>
+              </a:r>
+            </a:p>
+            <a:p>
+              <a:r>
+                <a:t>허혈성수술 : 미가입</a:t>
+              </a:r>
+            </a:p>
+            <a:p>
+              <a:r>
+                <a:t>심장 수술 : </a:t>
+              </a:r>
+            </a:p>
+            <a:p>
+              <a:r>
+                <a:t>5대기관수술 : </a:t>
+              </a:r>
+            </a:p>
+            <a:p>
+              <a:r>
+                <a:t>7대 수술 : </a:t>
+              </a:r>
+            </a:p>
+            <a:p>
+              <a:r>
+                <a:t>______수술 : </a:t>
               </a:r>
             </a:p>
           </p:txBody>
@@ -6323,12 +6314,12 @@
             <a:lstStyle/>
             <a:p>
               <a:r>
-                <a:t>상해수술  : </a:t>
-              </a:r>
-            </a:p>
-            <a:p>
-              <a:r>
-                <a:t>종합병원수술  : </a:t>
+                <a:t>상해수술 : 580만</a:t>
+              </a:r>
+            </a:p>
+            <a:p>
+              <a:r>
+                <a:t>종합병원수술 : 미가입</a:t>
               </a:r>
             </a:p>
             <a:p>
@@ -6343,32 +6334,32 @@
             </a:p>
             <a:p>
               <a:r>
-                <a:t>골절수술  : </a:t>
-              </a:r>
-            </a:p>
-            <a:p>
-              <a:r>
-                <a:t>5대골절수술  : </a:t>
-              </a:r>
-            </a:p>
-            <a:p>
-              <a:r>
-                <a:t>화상수술  : </a:t>
-              </a:r>
-            </a:p>
-            <a:p>
-              <a:r>
-                <a:t>중대상해수술  : </a:t>
-              </a:r>
-            </a:p>
-            <a:p>
-              <a:r>
-                <a:t>창상봉합수술  : </a:t>
-              </a:r>
-            </a:p>
-            <a:p>
-              <a:r>
-                <a:t>________수술  : </a:t>
+                <a:t>골절수술 : 미가입</a:t>
+              </a:r>
+            </a:p>
+            <a:p>
+              <a:r>
+                <a:t>5대골절수술 : 미가입</a:t>
+              </a:r>
+            </a:p>
+            <a:p>
+              <a:r>
+                <a:t>화상수술 : 미가입</a:t>
+              </a:r>
+            </a:p>
+            <a:p>
+              <a:r>
+                <a:t>중대상해수술 : 580만</a:t>
+              </a:r>
+            </a:p>
+            <a:p>
+              <a:r>
+                <a:t>창상봉합수술 : 미가입</a:t>
+              </a:r>
+            </a:p>
+            <a:p>
+              <a:r>
+                <a:t>________수술 : </a:t>
               </a:r>
             </a:p>
           </p:txBody>
@@ -6407,32 +6398,32 @@
             <a:lstStyle/>
             <a:p>
               <a:r>
-                <a:t>질병일당  : </a:t>
-              </a:r>
-            </a:p>
-            <a:p>
-              <a:r>
-                <a:t>상해일당  : </a:t>
-              </a:r>
-            </a:p>
-            <a:p>
-              <a:r>
-                <a:t>질병/상해중환자실  : </a:t>
-              </a:r>
-            </a:p>
-            <a:p>
-              <a:r>
-                <a:t>1인실 상급병원일당  : </a:t>
-              </a:r>
-            </a:p>
-            <a:p>
-              <a:r>
-                <a:t>1인실 종합병원일당  : </a:t>
-              </a:r>
-            </a:p>
-            <a:p>
-              <a:r>
-                <a:t>암일당  : </a:t>
+                <a:t>질병일당 : 미가입</a:t>
+              </a:r>
+            </a:p>
+            <a:p>
+              <a:r>
+                <a:t>상해일당 : 미가입</a:t>
+              </a:r>
+            </a:p>
+            <a:p>
+              <a:r>
+                <a:t>질병/상해중환자실 : 미가입</a:t>
+              </a:r>
+            </a:p>
+            <a:p>
+              <a:r>
+                <a:t>1인실 상급병원일당 : 미가입</a:t>
+              </a:r>
+            </a:p>
+            <a:p>
+              <a:r>
+                <a:t>1인실 종합병원일당 : 미가입</a:t>
+              </a:r>
+            </a:p>
+            <a:p>
+              <a:r>
+                <a:t>암일당 : 미가입</a:t>
               </a:r>
             </a:p>
             <a:p>
@@ -6442,12 +6433,12 @@
             </a:p>
             <a:p>
               <a:r>
-                <a:t>간병인일당  : </a:t>
-              </a:r>
-            </a:p>
-            <a:p>
-              <a:r>
-                <a:t>간호통합병동일당  : </a:t>
+                <a:t>간병인일당 : 4만</a:t>
+              </a:r>
+            </a:p>
+            <a:p>
+              <a:r>
+                <a:t>간호통합병동일당 : 미가입</a:t>
               </a:r>
             </a:p>
           </p:txBody>
@@ -6470,11 +6461,21 @@
           <a:noFill/>
         </p:spPr>
         <p:txBody>
-          <a:bodyPr wrap="square" tIns="0" bIns="0">
+          <a:bodyPr wrap="none" tIns="0" bIns="0" anchor="ctr">
             <a:normAutofit/>
           </a:bodyPr>
           <a:lstStyle/>
-          <a:p/>
+          <a:p>
+            <a:pPr algn="ctr"/>
+            <a:r>
+              <a:rPr sz="1200" b="1">
+                <a:solidFill>
+                  <a:srgbClr val="222222"/>
+                </a:solidFill>
+              </a:rPr>
+              <a:t>1천만</a:t>
+            </a:r>
+          </a:p>
         </p:txBody>
       </p:sp>
       <p:sp>
@@ -6494,11 +6495,21 @@
           <a:noFill/>
         </p:spPr>
         <p:txBody>
-          <a:bodyPr wrap="square" tIns="0" bIns="0">
+          <a:bodyPr wrap="none" tIns="0" bIns="0" anchor="ctr">
             <a:normAutofit/>
           </a:bodyPr>
           <a:lstStyle/>
-          <a:p/>
+          <a:p>
+            <a:pPr algn="ctr"/>
+            <a:r>
+              <a:rPr sz="1200" b="1">
+                <a:solidFill>
+                  <a:srgbClr val="0000FF"/>
+                </a:solidFill>
+              </a:rPr>
+              <a:t>1억4천만</a:t>
+            </a:r>
+          </a:p>
         </p:txBody>
       </p:sp>
       <p:sp>
@@ -6518,11 +6529,21 @@
           <a:noFill/>
         </p:spPr>
         <p:txBody>
-          <a:bodyPr wrap="square" tIns="0" bIns="0">
+          <a:bodyPr wrap="none" tIns="0" bIns="0" anchor="ctr">
             <a:normAutofit/>
           </a:bodyPr>
           <a:lstStyle/>
-          <a:p/>
+          <a:p>
+            <a:pPr algn="ctr"/>
+            <a:r>
+              <a:rPr sz="1200" b="1">
+                <a:solidFill>
+                  <a:srgbClr val="0000FF"/>
+                </a:solidFill>
+              </a:rPr>
+              <a:t>2억9천만</a:t>
+            </a:r>
+          </a:p>
         </p:txBody>
       </p:sp>
       <p:sp>
@@ -6548,12 +6569,7 @@
           <a:lstStyle/>
           <a:p>
             <a:r>
-              <a:rPr b="1" dirty="0">
-                <a:solidFill>
-                  <a:srgbClr val="000000"/>
-                </a:solidFill>
-              </a:rPr>
-              <a:t>2026년 05월 28일 기준</a:t>
+              <a:t>2026년 06월 03일 기준</a:t>
             </a:r>
           </a:p>
         </p:txBody>
@@ -6587,12 +6603,12 @@
           <a:lstStyle/>
           <a:p>
             <a:r>
-              <a:t>협심증/심부전 등  : </a:t>
-            </a:r>
-          </a:p>
-          <a:p>
-            <a:r>
-              <a:t>부정맥  : </a:t>
+              <a:t>협심증/심부전 등 : 미가입</a:t>
+            </a:r>
+          </a:p>
+          <a:p>
+            <a:r>
+              <a:t>부정맥 : 미가입</a:t>
             </a:r>
           </a:p>
         </p:txBody>
@@ -6620,11 +6636,21 @@
           <a:noFill/>
         </p:spPr>
         <p:txBody>
-          <a:bodyPr wrap="square" tIns="0" bIns="0">
+          <a:bodyPr wrap="none" tIns="0" bIns="0" anchor="ctr">
             <a:normAutofit/>
           </a:bodyPr>
           <a:lstStyle/>
-          <a:p/>
+          <a:p>
+            <a:pPr algn="ctr"/>
+            <a:r>
+              <a:rPr sz="1200" b="1">
+                <a:solidFill>
+                  <a:srgbClr val="222222"/>
+                </a:solidFill>
+              </a:rPr>
+              <a:t>9300만</a:t>
+            </a:r>
+          </a:p>
         </p:txBody>
       </p:sp>
     </p:spTree>
@@ -6673,7 +6699,142 @@
           <a:lstStyle/>
           <a:p>
             <a:r>
-              <a:t>보장분석 메모</a:t>
+              <a:t>보장분석 메모 — 값 확인 필요 (*)</a:t>
+            </a:r>
+          </a:p>
+          <a:p>
+            <a:r>
+              <a:t>● [계약 갱신/비갱신 판정] No.1 THE롯데손보(운전자): 계약10년·납입10년→납입≈만기=갱신 형태이나 운전자보험 상품 특성상 비갱신 확정형으로 판단. 담보명에 갱신 표기 없음. 비갱신 처리.</a:t>
+            </a:r>
+          </a:p>
+          <a:p>
+            <a:r>
+              <a:t>● [계약 갱신/비갱신] No.2 롯데손보(종신): 만기2075·납입20년(140/240)→생보 종신, 일반사망(종신)=9999만원, 30만원은 질병사망 특약. 비갱신.</a:t>
+            </a:r>
+          </a:p>
+          <a:p>
+            <a:r>
+              <a:t>● [계약 갱신/비갱신] No.3 롯데손보(건강-비갱신): 만기9999·납입30년→비갱신.</a:t>
+            </a:r>
+          </a:p>
+          <a:p>
+            <a:r>
+              <a:t>● [계약 갱신/비갱신] No.4,5 롯데손보(건강NEW): 만기9999·납입10년/7년→비갱신.</a:t>
+            </a:r>
+          </a:p>
+          <a:p>
+            <a:r>
+              <a:t>● [계약 갱신/비갱신] No.6 (GA): 만기2076·납입20년→비갱신.</a:t>
+            </a:r>
+          </a:p>
+          <a:p>
+            <a:r>
+              <a:t>● [계약 갱신/비갱신] No.7 let:smile 4060: 만기2066·납입20년→비갱신. 단, 담보 중 실손·갱신형 개별 담보는 renew:true 처리 필요 — 해당 상품 실손 담보 존재 여부 분석지에서 미확인, let:smile 상품 내 실손담보 있을 경우 별도 확인 필요.</a:t>
+            </a:r>
+          </a:p>
+          <a:p>
+            <a:r>
+              <a:t>● [계약 갱신/비갱신] No.8 1004.2: 만기2076·납입46년→비갱신.</a:t>
+            </a:r>
+          </a:p>
+          <a:p>
+            <a:r>
+              <a:t>● [계약 갱신/비갱신] No.9 Super s0904: 만기2076·납입67년→비갱신. 내부 실손담보(5,000/30만원)는 1세대 실손(가입2009.07)→renew:true 처리.</a:t>
+            </a:r>
+          </a:p>
+          <a:p>
+            <a:r>
+              <a:t>● [계약 갱신/비갱신] No.10 KB 5.10.10: 만기2066·납입20년→비갱신.</a:t>
+            </a:r>
+          </a:p>
+          <a:p>
+            <a:r>
+              <a:t>● [계약 갱신/비갱신] No.11 DB생명 2510: 만기2045·납입20년→비갱신(종신보험, 생보).</a:t>
+            </a:r>
+          </a:p>
+          <a:p>
+            <a:r>
+              <a:t>● [계약 갱신/비갱신] No.12,13 Chubb 3대질병(갱신형)3종2구: 상품명에 갱신형 명시→갱신. 담보 전체 renew:true.</a:t>
+            </a:r>
+          </a:p>
+          <a:p>
+            <a:r>
+              <a:t>● [계약 갱신/비갱신] No.14 Chubb 1904(R/50세): 만기2030·납입10년→납입≈만기(갱신형 R표기)→갱신. renew:true.</a:t>
+            </a:r>
+          </a:p>
+          <a:p>
+            <a:r>
+              <a:t>● [Chubb 3대질병 3종2구 담보 분류] 분석지 상 '일반암진단비(3,000/5,000만)', '급성심근경색진단비(3,000/5,000만)', '뇌출혈진단비(3,000/5,000만)', '유사암진단비(250만)' 확인. Chubb 3대질병보장보험은 암·뇌출혈·급성심근경색 3가지 보장 상품(뇌졸중·허혈성심장질환 미포함). 3종은 체증형으로 가입금액이 단계별 증가하는 구조. 약관확인: 체증3 정확한 체증율 및 지급기준 증권 확인 요망.</a:t>
+            </a:r>
+          </a:p>
+          <a:p>
+            <a:r>
+              <a:t>● [Chubb 1904 R/50세 담보] 분석지에서 담보명이 한글 깨짐으로 불명확. 보험료 36,370원, 10년납, 갱신형(R표기) 구조. 담보별 지급금액이 0~13만원 소액이며 교통사고처리/입원일당 등 다수 포함으로 보임. 약관확인: Chubb 1904 R/50세 정확한 담보 구성 증권으로 확인 필요.</a:t>
+            </a:r>
+          </a:p>
+          <a:p>
+            <a:r>
+              <a:t>● [DB생명 2510 종신] 분석지 상 사망보험금 2,000만원, 후유장해1,000만원, 일반암(3-100%)1,000만원, 80%이상후유장해(5%씩5년)6,000만원, 50%이상후유장해100만원, 수술비 30/20만원, 1-5종수술비 20~1000만원, 질병입원 5만/상해입원 3만 등 확인. 생명보험 2510은 종신보험으로 사망=일반사망(종신).</a:t>
+            </a:r>
+          </a:p>
+          <a:p>
+            <a:r>
+              <a:t>● [Super s0904 실손] 가입일 2009.07.29→1세대 실손(~2009.09 기준), 질병5000/상해5000 및 질병통원30/상해통원30. renew:true 적용.</a:t>
+            </a:r>
+          </a:p>
+          <a:p>
+            <a:r>
+              <a:t>● [let:smile 4060 2604 담보] 매우 다양한 담보 포함: 일반암1,000만, 전이암8,000만, 고액항암치료13,000만, 뇌혈관계통수술1,000만, 급성심근경색2,000만, 허혈심장1,000만(법인산정특례형으로 보임), 상해후유장해(3-100%)1,000만, 질병후유장해(3-100%)(갱신형)1,000만 포함. 갱신형 후유장해 담보는 renew:true 처리. 암수술/입원일당 등 다수 담보 포함.</a:t>
+            </a:r>
+          </a:p>
+          <a:p>
+            <a:r>
+              <a:t>● [일반암 합계 집계] 총 가입금액: let:smile(ci6)5,000 + 롯데비갱신(ci2)300 + Super s0904(ci8)3,000 + KB5.10.10(ci9)1,000 = 9,300만원. 권장 10,000만원 대비 약간 부족.</a:t>
+            </a:r>
+          </a:p>
+          <a:p>
+            <a:r>
+              <a:t>● [뇌혈관/뇌출혈 합계] 뇌혈관진단비: ci2(300)+ci3(6,000)+ci5(1,000)+ci7(1,000)+ci9(1,000)=9,300만원. 뇌출혈진단비: ci0(1,000)+Chubb ci11(3,000)+ci12(5,000)+ci13(5,000)=14,000만원(갱신 포함). 권장 5,000만원 대비 충분하나 갱신형 다수 포함.</a:t>
+            </a:r>
+          </a:p>
+          <a:p>
+            <a:r>
+              <a:t>● [심장 담보 분류] 분석지에서 '허혈성심장질환진단비'와 '급성심근경색진단비' 별도 기재. let:smile 4060(ci6)의 '허혈성심장(1,000만)' → 허혈성심장질환진단비 분류. '심장질환수술비(900만)' 확인.</a:t>
+            </a:r>
+          </a:p>
+          <a:p>
+            <a:r>
+              <a:t>● [DB생명 2510 종신 사망담보] 생보 종신보험이므로 사망=일반사망(종신). 분석지에서 사망보험금 2,000만원 확인.</a:t>
+            </a:r>
+          </a:p>
+          <a:p>
+            <a:r>
+              <a:t>● [DB 여행자보험 별도계약] 25페이지에 DB 여행자보험(2022.09.17~2022.09.18, 보험료0원) 계약 1건이 있으나 이미 종료된 단기 여행자보험으로 보유계약 목록에서 제외(만료된 계약).</a:t>
+            </a:r>
+          </a:p>
+          <a:p>
+            <a:r>
+              <a:t>● [let:smile 4060 갱신형 후유장해] '(3~100%)(갱신형)' 후유장해 담보가 별도 존재. renew:true 처리. 비갱신 후유장해와 분리.</a:t>
+            </a:r>
+          </a:p>
+          <a:p>
+            <a:r>
+              <a:t>● [수술비 1-5종] KB 5.10.10 1~5종 질병수술비(1종20/2종50/3종200/4종500/5종500), 상해수술비(1종20/2종50/3종200/4종500/5종1000). 법칙에 따라 종별 최대값=5종 질병500만, 5종 상해1,000만 택1. DB 2510 1-5종(1종20/2종50/3종100/4종200/5종1000)=5종 1,000만. Super s0904 5종30만.</a:t>
+            </a:r>
+          </a:p>
+          <a:p>
+            <a:r>
+              <a:t>● [약관확인 필요] DB생명 2510: 주계약 사망보험금 2,000만원인데 체증형 가능성 있음(상품명 2510에서 '25년 10월' 출시 추정). 정확한 주계약 구성 및 체증 여부 증권 확인 요망.</a:t>
+            </a:r>
+          </a:p>
+          <a:p>
+            <a:r>
+              <a:t>● [약관확인 필요] let:smile 4060 2604: 뇌혈관계통수술비(1,000만), 심장질환수술비(900만) — 수술 범위 및 지급기준(1-5종 vs 별도 정의) 약관 확인 요망.</a:t>
+            </a:r>
+          </a:p>
+          <a:p>
+            <a:r>
+              <a:t>● [실손 현황] Super s0904(1세대 실손, 가입2009.07) 외 별도 실손 미가입 확인. 4세대 실손 신규 가입 권장.</a:t>
             </a:r>
           </a:p>
         </p:txBody>

--- a/form.pptx
+++ b/form.pptx
@@ -3012,22 +3012,22 @@
           <a:lstStyle/>
           <a:p>
             <a:r>
-              <a:t>질병 3% : 미가입</a:t>
-            </a:r>
-          </a:p>
-          <a:p>
-            <a:r>
-              <a:t>질병 80% : 미가입</a:t>
-            </a:r>
-          </a:p>
-          <a:p>
-            <a:r>
-              <a:t>상해3% : 미가입</a:t>
-            </a:r>
-          </a:p>
-          <a:p>
-            <a:r>
-              <a:t>상해 80% : 미가입</a:t>
+              <a:t>질병 3%  : </a:t>
+            </a:r>
+          </a:p>
+          <a:p>
+            <a:r>
+              <a:t>질병 80%  : </a:t>
+            </a:r>
+          </a:p>
+          <a:p>
+            <a:r>
+              <a:t>상해3%  : </a:t>
+            </a:r>
+          </a:p>
+          <a:p>
+            <a:r>
+              <a:t>상해 80%  : </a:t>
             </a:r>
           </a:p>
           <a:p>
@@ -3070,32 +3070,32 @@
           <a:lstStyle/>
           <a:p>
             <a:r>
-              <a:t>대인 : 7천만</a:t>
-            </a:r>
-          </a:p>
-          <a:p>
-            <a:r>
-              <a:t>대물 : 1500만</a:t>
-            </a:r>
-          </a:p>
-          <a:p>
-            <a:r>
-              <a:t>합의금 : 5억2천만</a:t>
-            </a:r>
-          </a:p>
-          <a:p>
-            <a:r>
-              <a:t>6주미만 : 미가입</a:t>
-            </a:r>
-          </a:p>
-          <a:p>
-            <a:r>
-              <a:t>변호사비 : 1억5천만</a:t>
-            </a:r>
-          </a:p>
-          <a:p>
-            <a:r>
-              <a:t>자부상 : 60만</a:t>
+              <a:t>대인  : </a:t>
+            </a:r>
+          </a:p>
+          <a:p>
+            <a:r>
+              <a:t>대물  : </a:t>
+            </a:r>
+          </a:p>
+          <a:p>
+            <a:r>
+              <a:t>합의금  : </a:t>
+            </a:r>
+          </a:p>
+          <a:p>
+            <a:r>
+              <a:t>6주미만  : </a:t>
+            </a:r>
+          </a:p>
+          <a:p>
+            <a:r>
+              <a:t>변호사비  : </a:t>
+            </a:r>
+          </a:p>
+          <a:p>
+            <a:r>
+              <a:t>자부상  : </a:t>
             </a:r>
           </a:p>
         </p:txBody>
@@ -3132,22 +3132,22 @@
           <a:lstStyle/>
           <a:p>
             <a:r>
-              <a:t>치매 : 미가입</a:t>
-            </a:r>
-          </a:p>
-          <a:p>
-            <a:r>
-              <a:t>재가 : 미가입</a:t>
-            </a:r>
-          </a:p>
-          <a:p>
-            <a:r>
-              <a:t>노치원 : 미가입</a:t>
-            </a:r>
-          </a:p>
-          <a:p>
-            <a:r>
-              <a:t>시설 : 미가입</a:t>
+              <a:t>치매  : </a:t>
+            </a:r>
+          </a:p>
+          <a:p>
+            <a:r>
+              <a:t>재가  : </a:t>
+            </a:r>
+          </a:p>
+          <a:p>
+            <a:r>
+              <a:t>노치원  : </a:t>
+            </a:r>
+          </a:p>
+          <a:p>
+            <a:r>
+              <a:t>시설  : </a:t>
             </a:r>
           </a:p>
         </p:txBody>
@@ -3184,22 +3184,22 @@
           <a:lstStyle/>
           <a:p>
             <a:r>
-              <a:t>크라운 : 미가입</a:t>
-            </a:r>
-          </a:p>
-          <a:p>
-            <a:r>
-              <a:t>임플란트 : 미가입</a:t>
-            </a:r>
-          </a:p>
-          <a:p>
-            <a:r>
-              <a:t>기타 : 미가입</a:t>
-            </a:r>
-          </a:p>
-          <a:p>
-            <a:r>
-              <a:t>화재보험 : 미가입</a:t>
+              <a:t>크라운  : </a:t>
+            </a:r>
+          </a:p>
+          <a:p>
+            <a:r>
+              <a:t>임플란트  : </a:t>
+            </a:r>
+          </a:p>
+          <a:p>
+            <a:r>
+              <a:t>기타  : </a:t>
+            </a:r>
+          </a:p>
+          <a:p>
+            <a:r>
+              <a:t>화재보험  : </a:t>
             </a:r>
           </a:p>
         </p:txBody>
@@ -3672,7 +3672,14 @@
             <a:lstStyle/>
             <a:p>
               <a:r>
-                <a:t>*님의 보장</a:t>
+                <a:rPr lang="ko-KR" altLang="en-US" sz="2000" dirty="0">
+                  <a:solidFill>
+                    <a:srgbClr val="000000"/>
+                  </a:solidFill>
+                  <a:latin typeface="HY엽서M" panose="02030600000101010101" pitchFamily="18" charset="-127"/>
+                  <a:ea typeface="HY엽서M" panose="02030600000101010101" pitchFamily="18" charset="-127"/>
+                </a:rPr>
+                <a:t>허정원님의 보장</a:t>
               </a:r>
             </a:p>
           </p:txBody>
@@ -4494,19 +4501,21 @@
             </a:ln>
           </p:spPr>
           <p:txBody>
-            <a:bodyPr wrap="none" rtlCol="0" anchor="ctr">
+            <a:bodyPr wrap="square" rtlCol="0">
               <a:normAutofit/>
             </a:bodyPr>
             <a:lstStyle/>
             <a:p>
               <a:pPr algn="ctr"/>
               <a:r>
-                <a:rPr sz="1200" b="1">
+                <a:rPr lang="ko-KR" altLang="en-US" sz="1100" dirty="0">
                   <a:solidFill>
-                    <a:srgbClr val="222222"/>
+                    <a:srgbClr val="000000"/>
                   </a:solidFill>
+                  <a:latin typeface="HY엽서M" panose="02030600000101010101" pitchFamily="18" charset="-127"/>
+                  <a:ea typeface="HY엽서M" panose="02030600000101010101" pitchFamily="18" charset="-127"/>
                 </a:rPr>
-                <a:t>1천만</a:t>
+                <a:t>뇌출혈</a:t>
               </a:r>
             </a:p>
           </p:txBody>
@@ -4545,17 +4554,17 @@
             <a:lstStyle/>
             <a:p>
               <a:r>
-                <a:t>산정특례(뇌혈관) : 미가입</a:t>
-              </a:r>
-            </a:p>
-            <a:p>
-              <a:r>
-                <a:t>혈전용해치료비 : 미가입</a:t>
-              </a:r>
-            </a:p>
-            <a:p>
-              <a:r>
-                <a:t>2대주요치료비 : 미가입</a:t>
+                <a:t>산정특례(뇌혈관)  : </a:t>
+              </a:r>
+            </a:p>
+            <a:p>
+              <a:r>
+                <a:t>혈전용해치료비  : </a:t>
+              </a:r>
+            </a:p>
+            <a:p>
+              <a:r>
+                <a:t>2대주요치료비  : </a:t>
               </a:r>
             </a:p>
           </p:txBody>
@@ -4735,17 +4744,17 @@
             <a:lstStyle/>
             <a:p>
               <a:r>
-                <a:t>산정특례(심장) : 미가입</a:t>
-              </a:r>
-            </a:p>
-            <a:p>
-              <a:r>
-                <a:t>혈전용해치료비 : 미가입</a:t>
-              </a:r>
-            </a:p>
-            <a:p>
-              <a:r>
-                <a:t>2대주요치료비 : 미가입</a:t>
+                <a:t>산정특례(심장)  : </a:t>
+              </a:r>
+            </a:p>
+            <a:p>
+              <a:r>
+                <a:t>혈전용해치료비  : </a:t>
+              </a:r>
+            </a:p>
+            <a:p>
+              <a:r>
+                <a:t>2대주요치료비  : </a:t>
               </a:r>
             </a:p>
           </p:txBody>
@@ -4784,7 +4793,7 @@
             <a:lstStyle/>
             <a:p>
               <a:r>
-                <a:t>암주요(고액) : 미가입</a:t>
+                <a:t>암주요(고액)  : </a:t>
               </a:r>
             </a:p>
           </p:txBody>
@@ -5895,7 +5904,7 @@
             <a:lstStyle/>
             <a:p>
               <a:r>
-                <a:t>일상배상책임 : 2억</a:t>
+                <a:t>일상배상책임  : </a:t>
               </a:r>
             </a:p>
           </p:txBody>
@@ -5934,27 +5943,27 @@
             <a:lstStyle/>
             <a:p>
               <a:r>
-                <a:t>입원 : 미가입</a:t>
-              </a:r>
-            </a:p>
-            <a:p>
-              <a:r>
-                <a:t>통원 : 미가입</a:t>
-              </a:r>
-            </a:p>
-            <a:p>
-              <a:r>
-                <a:t>MRI : 미가입</a:t>
-              </a:r>
-            </a:p>
-            <a:p>
-              <a:r>
-                <a:t>도수치료 : 미가입</a:t>
-              </a:r>
-            </a:p>
-            <a:p>
-              <a:r>
-                <a:t>비급여주사 : 미가입</a:t>
+                <a:t>입원  : </a:t>
+              </a:r>
+            </a:p>
+            <a:p>
+              <a:r>
+                <a:t>통원  : </a:t>
+              </a:r>
+            </a:p>
+            <a:p>
+              <a:r>
+                <a:t>MRI  : </a:t>
+              </a:r>
+            </a:p>
+            <a:p>
+              <a:r>
+                <a:t>도수치료  : </a:t>
+              </a:r>
+            </a:p>
+            <a:p>
+              <a:r>
+                <a:t>비급여주사  : </a:t>
               </a:r>
             </a:p>
           </p:txBody>
@@ -5993,37 +6002,37 @@
             <a:lstStyle/>
             <a:p>
               <a:r>
-                <a:t>골절 : 142만</a:t>
-              </a:r>
-            </a:p>
-            <a:p>
-              <a:r>
-                <a:t>5대골절 : 미가입</a:t>
-              </a:r>
-            </a:p>
-            <a:p>
-              <a:r>
-                <a:t>화상 : 미가입</a:t>
-              </a:r>
-            </a:p>
-            <a:p>
-              <a:r>
-                <a:t>중대화상 : 미가입</a:t>
-              </a:r>
-            </a:p>
-            <a:p>
-              <a:r>
-                <a:t>반깁스 : 미가입</a:t>
-              </a:r>
-            </a:p>
-            <a:p>
-              <a:r>
-                <a:t>깁스 : 130만</a:t>
-              </a:r>
-            </a:p>
-            <a:p>
-              <a:r>
-                <a:t>응급실 : 82만</a:t>
+                <a:t>골절  : </a:t>
+              </a:r>
+            </a:p>
+            <a:p>
+              <a:r>
+                <a:t>5대골절  : </a:t>
+              </a:r>
+            </a:p>
+            <a:p>
+              <a:r>
+                <a:t>화상  : </a:t>
+              </a:r>
+            </a:p>
+            <a:p>
+              <a:r>
+                <a:t>중대화상  : </a:t>
+              </a:r>
+            </a:p>
+            <a:p>
+              <a:r>
+                <a:t>반깁스  : </a:t>
+              </a:r>
+            </a:p>
+            <a:p>
+              <a:r>
+                <a:t>깁스  : </a:t>
+              </a:r>
+            </a:p>
+            <a:p>
+              <a:r>
+                <a:t>응급실  : </a:t>
               </a:r>
             </a:p>
           </p:txBody>
@@ -6067,17 +6076,17 @@
             </a:p>
             <a:p>
               <a:r>
-                <a:t>- ___세 : 2억</a:t>
-              </a:r>
-            </a:p>
-            <a:p>
-              <a:r>
-                <a:t>80세 : 미가입</a:t>
-              </a:r>
-            </a:p>
-            <a:p>
-              <a:r>
-                <a:t>종신 : 9999만</a:t>
+                <a:t>- ___세  : </a:t>
+              </a:r>
+            </a:p>
+            <a:p>
+              <a:r>
+                <a:t>80세  : </a:t>
+              </a:r>
+            </a:p>
+            <a:p>
+              <a:r>
+                <a:t>종신  : </a:t>
               </a:r>
             </a:p>
           </p:txBody>
@@ -6116,7 +6125,7 @@
             <a:lstStyle/>
             <a:p>
               <a:r>
-                <a:t>상해사망 : 8억2천만</a:t>
+                <a:t>상해사망  : </a:t>
               </a:r>
             </a:p>
           </p:txBody>
@@ -6155,43 +6164,43 @@
             <a:lstStyle/>
             <a:p>
               <a:r>
-                <a:t>암진단비 : 1억7천만</a:t>
-              </a:r>
-            </a:p>
-            <a:p>
-              <a:r>
-                <a:t>유사암 : 미가입</a:t>
-              </a:r>
-            </a:p>
-            <a:p>
-              <a:r>
-                <a:t>통합암 : 미가입</a:t>
-              </a:r>
-            </a:p>
-            <a:p>
-              <a:r>
-                <a:t>전이암 : 8100만</a:t>
+                <a:t>암진단비  : </a:t>
+              </a:r>
+            </a:p>
+            <a:p>
+              <a:r>
+                <a:t>유사암  : </a:t>
+              </a:r>
+            </a:p>
+            <a:p>
+              <a:r>
+                <a:t>통합암  : </a:t>
+              </a:r>
+            </a:p>
+            <a:p>
+              <a:r>
+                <a:t>전이암  : </a:t>
               </a:r>
             </a:p>
             <a:p/>
             <a:p>
               <a:r>
-                <a:t>항암치료 : 1억3천만</a:t>
-              </a:r>
-            </a:p>
-            <a:p>
-              <a:r>
-                <a:t>표적/양성자.세기 : 미가입</a:t>
-              </a:r>
-            </a:p>
-            <a:p>
-              <a:r>
-                <a:t>암통원비 : 미가입</a:t>
-              </a:r>
-            </a:p>
-            <a:p>
-              <a:r>
-                <a:t>다빈치 : 미가입</a:t>
+                <a:t>항암치료  : </a:t>
+              </a:r>
+            </a:p>
+            <a:p>
+              <a:r>
+                <a:t>표적/양성자.세기  : </a:t>
+              </a:r>
+            </a:p>
+            <a:p>
+              <a:r>
+                <a:t>암통원비  : </a:t>
+              </a:r>
+            </a:p>
+            <a:p>
+              <a:r>
+                <a:t>다빈치  : </a:t>
               </a:r>
             </a:p>
           </p:txBody>
@@ -6230,7 +6239,7 @@
             <a:lstStyle/>
             <a:p>
               <a:r>
-                <a:t>질병수술 : 110만</a:t>
+                <a:t>질병수술  : </a:t>
               </a:r>
             </a:p>
             <a:p>
@@ -6245,37 +6254,37 @@
             </a:p>
             <a:p>
               <a:r>
-                <a:t>119대 수술 : 미가입</a:t>
-              </a:r>
-            </a:p>
-            <a:p>
-              <a:r>
-                <a:t>뇌혈관수술 : 1200만</a:t>
-              </a:r>
-            </a:p>
-            <a:p>
-              <a:r>
-                <a:t>허혈성수술 : 미가입</a:t>
-              </a:r>
-            </a:p>
-            <a:p>
-              <a:r>
-                <a:t>심장 수술 : </a:t>
-              </a:r>
-            </a:p>
-            <a:p>
-              <a:r>
-                <a:t>5대기관수술 : </a:t>
-              </a:r>
-            </a:p>
-            <a:p>
-              <a:r>
-                <a:t>7대 수술 : </a:t>
-              </a:r>
-            </a:p>
-            <a:p>
-              <a:r>
-                <a:t>______수술 : </a:t>
+                <a:t>119대 수술  : </a:t>
+              </a:r>
+            </a:p>
+            <a:p>
+              <a:r>
+                <a:t>뇌혈관수술  : </a:t>
+              </a:r>
+            </a:p>
+            <a:p>
+              <a:r>
+                <a:t>허혈성수술  : </a:t>
+              </a:r>
+            </a:p>
+            <a:p>
+              <a:r>
+                <a:t>심장 수술  : </a:t>
+              </a:r>
+            </a:p>
+            <a:p>
+              <a:r>
+                <a:t>5대기관수술  : </a:t>
+              </a:r>
+            </a:p>
+            <a:p>
+              <a:r>
+                <a:t>7대 수술  : </a:t>
+              </a:r>
+            </a:p>
+            <a:p>
+              <a:r>
+                <a:t>______수술  : </a:t>
               </a:r>
             </a:p>
           </p:txBody>
@@ -6314,12 +6323,12 @@
             <a:lstStyle/>
             <a:p>
               <a:r>
-                <a:t>상해수술 : 580만</a:t>
-              </a:r>
-            </a:p>
-            <a:p>
-              <a:r>
-                <a:t>종합병원수술 : 미가입</a:t>
+                <a:t>상해수술  : </a:t>
+              </a:r>
+            </a:p>
+            <a:p>
+              <a:r>
+                <a:t>종합병원수술  : </a:t>
               </a:r>
             </a:p>
             <a:p>
@@ -6334,32 +6343,32 @@
             </a:p>
             <a:p>
               <a:r>
-                <a:t>골절수술 : 미가입</a:t>
-              </a:r>
-            </a:p>
-            <a:p>
-              <a:r>
-                <a:t>5대골절수술 : 미가입</a:t>
-              </a:r>
-            </a:p>
-            <a:p>
-              <a:r>
-                <a:t>화상수술 : 미가입</a:t>
-              </a:r>
-            </a:p>
-            <a:p>
-              <a:r>
-                <a:t>중대상해수술 : 580만</a:t>
-              </a:r>
-            </a:p>
-            <a:p>
-              <a:r>
-                <a:t>창상봉합수술 : 미가입</a:t>
-              </a:r>
-            </a:p>
-            <a:p>
-              <a:r>
-                <a:t>________수술 : </a:t>
+                <a:t>골절수술  : </a:t>
+              </a:r>
+            </a:p>
+            <a:p>
+              <a:r>
+                <a:t>5대골절수술  : </a:t>
+              </a:r>
+            </a:p>
+            <a:p>
+              <a:r>
+                <a:t>화상수술  : </a:t>
+              </a:r>
+            </a:p>
+            <a:p>
+              <a:r>
+                <a:t>중대상해수술  : </a:t>
+              </a:r>
+            </a:p>
+            <a:p>
+              <a:r>
+                <a:t>창상봉합수술  : </a:t>
+              </a:r>
+            </a:p>
+            <a:p>
+              <a:r>
+                <a:t>________수술  : </a:t>
               </a:r>
             </a:p>
           </p:txBody>
@@ -6398,32 +6407,32 @@
             <a:lstStyle/>
             <a:p>
               <a:r>
-                <a:t>질병일당 : 미가입</a:t>
-              </a:r>
-            </a:p>
-            <a:p>
-              <a:r>
-                <a:t>상해일당 : 미가입</a:t>
-              </a:r>
-            </a:p>
-            <a:p>
-              <a:r>
-                <a:t>질병/상해중환자실 : 미가입</a:t>
-              </a:r>
-            </a:p>
-            <a:p>
-              <a:r>
-                <a:t>1인실 상급병원일당 : 미가입</a:t>
-              </a:r>
-            </a:p>
-            <a:p>
-              <a:r>
-                <a:t>1인실 종합병원일당 : 미가입</a:t>
-              </a:r>
-            </a:p>
-            <a:p>
-              <a:r>
-                <a:t>암일당 : 미가입</a:t>
+                <a:t>질병일당  : </a:t>
+              </a:r>
+            </a:p>
+            <a:p>
+              <a:r>
+                <a:t>상해일당  : </a:t>
+              </a:r>
+            </a:p>
+            <a:p>
+              <a:r>
+                <a:t>질병/상해중환자실  : </a:t>
+              </a:r>
+            </a:p>
+            <a:p>
+              <a:r>
+                <a:t>1인실 상급병원일당  : </a:t>
+              </a:r>
+            </a:p>
+            <a:p>
+              <a:r>
+                <a:t>1인실 종합병원일당  : </a:t>
+              </a:r>
+            </a:p>
+            <a:p>
+              <a:r>
+                <a:t>암일당  : </a:t>
               </a:r>
             </a:p>
             <a:p>
@@ -6433,12 +6442,12 @@
             </a:p>
             <a:p>
               <a:r>
-                <a:t>간병인일당 : 4만</a:t>
-              </a:r>
-            </a:p>
-            <a:p>
-              <a:r>
-                <a:t>간호통합병동일당 : 미가입</a:t>
+                <a:t>간병인일당  : </a:t>
+              </a:r>
+            </a:p>
+            <a:p>
+              <a:r>
+                <a:t>간호통합병동일당  : </a:t>
               </a:r>
             </a:p>
           </p:txBody>
@@ -6461,21 +6470,11 @@
           <a:noFill/>
         </p:spPr>
         <p:txBody>
-          <a:bodyPr wrap="none" tIns="0" bIns="0" anchor="ctr">
+          <a:bodyPr wrap="square" tIns="0" bIns="0">
             <a:normAutofit/>
           </a:bodyPr>
           <a:lstStyle/>
-          <a:p>
-            <a:pPr algn="ctr"/>
-            <a:r>
-              <a:rPr sz="1200" b="1">
-                <a:solidFill>
-                  <a:srgbClr val="222222"/>
-                </a:solidFill>
-              </a:rPr>
-              <a:t>1천만</a:t>
-            </a:r>
-          </a:p>
+          <a:p/>
         </p:txBody>
       </p:sp>
       <p:sp>
@@ -6495,21 +6494,11 @@
           <a:noFill/>
         </p:spPr>
         <p:txBody>
-          <a:bodyPr wrap="none" tIns="0" bIns="0" anchor="ctr">
+          <a:bodyPr wrap="square" tIns="0" bIns="0">
             <a:normAutofit/>
           </a:bodyPr>
           <a:lstStyle/>
-          <a:p>
-            <a:pPr algn="ctr"/>
-            <a:r>
-              <a:rPr sz="1200" b="1">
-                <a:solidFill>
-                  <a:srgbClr val="0000FF"/>
-                </a:solidFill>
-              </a:rPr>
-              <a:t>1억4천만</a:t>
-            </a:r>
-          </a:p>
+          <a:p/>
         </p:txBody>
       </p:sp>
       <p:sp>
@@ -6529,21 +6518,11 @@
           <a:noFill/>
         </p:spPr>
         <p:txBody>
-          <a:bodyPr wrap="none" tIns="0" bIns="0" anchor="ctr">
+          <a:bodyPr wrap="square" tIns="0" bIns="0">
             <a:normAutofit/>
           </a:bodyPr>
           <a:lstStyle/>
-          <a:p>
-            <a:pPr algn="ctr"/>
-            <a:r>
-              <a:rPr sz="1200" b="1">
-                <a:solidFill>
-                  <a:srgbClr val="0000FF"/>
-                </a:solidFill>
-              </a:rPr>
-              <a:t>2억9천만</a:t>
-            </a:r>
-          </a:p>
+          <a:p/>
         </p:txBody>
       </p:sp>
       <p:sp>
@@ -6569,7 +6548,12 @@
           <a:lstStyle/>
           <a:p>
             <a:r>
-              <a:t>2026년 06월 03일 기준</a:t>
+              <a:rPr b="1" dirty="0">
+                <a:solidFill>
+                  <a:srgbClr val="000000"/>
+                </a:solidFill>
+              </a:rPr>
+              <a:t>2026년 05월 28일 기준</a:t>
             </a:r>
           </a:p>
         </p:txBody>
@@ -6603,12 +6587,12 @@
           <a:lstStyle/>
           <a:p>
             <a:r>
-              <a:t>협심증/심부전 등 : 미가입</a:t>
-            </a:r>
-          </a:p>
-          <a:p>
-            <a:r>
-              <a:t>부정맥 : 미가입</a:t>
+              <a:t>협심증/심부전 등  : </a:t>
+            </a:r>
+          </a:p>
+          <a:p>
+            <a:r>
+              <a:t>부정맥  : </a:t>
             </a:r>
           </a:p>
         </p:txBody>
@@ -6636,21 +6620,11 @@
           <a:noFill/>
         </p:spPr>
         <p:txBody>
-          <a:bodyPr wrap="none" tIns="0" bIns="0" anchor="ctr">
+          <a:bodyPr wrap="square" tIns="0" bIns="0">
             <a:normAutofit/>
           </a:bodyPr>
           <a:lstStyle/>
-          <a:p>
-            <a:pPr algn="ctr"/>
-            <a:r>
-              <a:rPr sz="1200" b="1">
-                <a:solidFill>
-                  <a:srgbClr val="222222"/>
-                </a:solidFill>
-              </a:rPr>
-              <a:t>9300만</a:t>
-            </a:r>
-          </a:p>
+          <a:p/>
         </p:txBody>
       </p:sp>
     </p:spTree>
@@ -6699,142 +6673,7 @@
           <a:lstStyle/>
           <a:p>
             <a:r>
-              <a:t>보장분석 메모 — 값 확인 필요 (*)</a:t>
-            </a:r>
-          </a:p>
-          <a:p>
-            <a:r>
-              <a:t>● [계약 갱신/비갱신 판정] No.1 THE롯데손보(운전자): 계약10년·납입10년→납입≈만기=갱신 형태이나 운전자보험 상품 특성상 비갱신 확정형으로 판단. 담보명에 갱신 표기 없음. 비갱신 처리.</a:t>
-            </a:r>
-          </a:p>
-          <a:p>
-            <a:r>
-              <a:t>● [계약 갱신/비갱신] No.2 롯데손보(종신): 만기2075·납입20년(140/240)→생보 종신, 일반사망(종신)=9999만원, 30만원은 질병사망 특약. 비갱신.</a:t>
-            </a:r>
-          </a:p>
-          <a:p>
-            <a:r>
-              <a:t>● [계약 갱신/비갱신] No.3 롯데손보(건강-비갱신): 만기9999·납입30년→비갱신.</a:t>
-            </a:r>
-          </a:p>
-          <a:p>
-            <a:r>
-              <a:t>● [계약 갱신/비갱신] No.4,5 롯데손보(건강NEW): 만기9999·납입10년/7년→비갱신.</a:t>
-            </a:r>
-          </a:p>
-          <a:p>
-            <a:r>
-              <a:t>● [계약 갱신/비갱신] No.6 (GA): 만기2076·납입20년→비갱신.</a:t>
-            </a:r>
-          </a:p>
-          <a:p>
-            <a:r>
-              <a:t>● [계약 갱신/비갱신] No.7 let:smile 4060: 만기2066·납입20년→비갱신. 단, 담보 중 실손·갱신형 개별 담보는 renew:true 처리 필요 — 해당 상품 실손 담보 존재 여부 분석지에서 미확인, let:smile 상품 내 실손담보 있을 경우 별도 확인 필요.</a:t>
-            </a:r>
-          </a:p>
-          <a:p>
-            <a:r>
-              <a:t>● [계약 갱신/비갱신] No.8 1004.2: 만기2076·납입46년→비갱신.</a:t>
-            </a:r>
-          </a:p>
-          <a:p>
-            <a:r>
-              <a:t>● [계약 갱신/비갱신] No.9 Super s0904: 만기2076·납입67년→비갱신. 내부 실손담보(5,000/30만원)는 1세대 실손(가입2009.07)→renew:true 처리.</a:t>
-            </a:r>
-          </a:p>
-          <a:p>
-            <a:r>
-              <a:t>● [계약 갱신/비갱신] No.10 KB 5.10.10: 만기2066·납입20년→비갱신.</a:t>
-            </a:r>
-          </a:p>
-          <a:p>
-            <a:r>
-              <a:t>● [계약 갱신/비갱신] No.11 DB생명 2510: 만기2045·납입20년→비갱신(종신보험, 생보).</a:t>
-            </a:r>
-          </a:p>
-          <a:p>
-            <a:r>
-              <a:t>● [계약 갱신/비갱신] No.12,13 Chubb 3대질병(갱신형)3종2구: 상품명에 갱신형 명시→갱신. 담보 전체 renew:true.</a:t>
-            </a:r>
-          </a:p>
-          <a:p>
-            <a:r>
-              <a:t>● [계약 갱신/비갱신] No.14 Chubb 1904(R/50세): 만기2030·납입10년→납입≈만기(갱신형 R표기)→갱신. renew:true.</a:t>
-            </a:r>
-          </a:p>
-          <a:p>
-            <a:r>
-              <a:t>● [Chubb 3대질병 3종2구 담보 분류] 분석지 상 '일반암진단비(3,000/5,000만)', '급성심근경색진단비(3,000/5,000만)', '뇌출혈진단비(3,000/5,000만)', '유사암진단비(250만)' 확인. Chubb 3대질병보장보험은 암·뇌출혈·급성심근경색 3가지 보장 상품(뇌졸중·허혈성심장질환 미포함). 3종은 체증형으로 가입금액이 단계별 증가하는 구조. 약관확인: 체증3 정확한 체증율 및 지급기준 증권 확인 요망.</a:t>
-            </a:r>
-          </a:p>
-          <a:p>
-            <a:r>
-              <a:t>● [Chubb 1904 R/50세 담보] 분석지에서 담보명이 한글 깨짐으로 불명확. 보험료 36,370원, 10년납, 갱신형(R표기) 구조. 담보별 지급금액이 0~13만원 소액이며 교통사고처리/입원일당 등 다수 포함으로 보임. 약관확인: Chubb 1904 R/50세 정확한 담보 구성 증권으로 확인 필요.</a:t>
-            </a:r>
-          </a:p>
-          <a:p>
-            <a:r>
-              <a:t>● [DB생명 2510 종신] 분석지 상 사망보험금 2,000만원, 후유장해1,000만원, 일반암(3-100%)1,000만원, 80%이상후유장해(5%씩5년)6,000만원, 50%이상후유장해100만원, 수술비 30/20만원, 1-5종수술비 20~1000만원, 질병입원 5만/상해입원 3만 등 확인. 생명보험 2510은 종신보험으로 사망=일반사망(종신).</a:t>
-            </a:r>
-          </a:p>
-          <a:p>
-            <a:r>
-              <a:t>● [Super s0904 실손] 가입일 2009.07.29→1세대 실손(~2009.09 기준), 질병5000/상해5000 및 질병통원30/상해통원30. renew:true 적용.</a:t>
-            </a:r>
-          </a:p>
-          <a:p>
-            <a:r>
-              <a:t>● [let:smile 4060 2604 담보] 매우 다양한 담보 포함: 일반암1,000만, 전이암8,000만, 고액항암치료13,000만, 뇌혈관계통수술1,000만, 급성심근경색2,000만, 허혈심장1,000만(법인산정특례형으로 보임), 상해후유장해(3-100%)1,000만, 질병후유장해(3-100%)(갱신형)1,000만 포함. 갱신형 후유장해 담보는 renew:true 처리. 암수술/입원일당 등 다수 담보 포함.</a:t>
-            </a:r>
-          </a:p>
-          <a:p>
-            <a:r>
-              <a:t>● [일반암 합계 집계] 총 가입금액: let:smile(ci6)5,000 + 롯데비갱신(ci2)300 + Super s0904(ci8)3,000 + KB5.10.10(ci9)1,000 = 9,300만원. 권장 10,000만원 대비 약간 부족.</a:t>
-            </a:r>
-          </a:p>
-          <a:p>
-            <a:r>
-              <a:t>● [뇌혈관/뇌출혈 합계] 뇌혈관진단비: ci2(300)+ci3(6,000)+ci5(1,000)+ci7(1,000)+ci9(1,000)=9,300만원. 뇌출혈진단비: ci0(1,000)+Chubb ci11(3,000)+ci12(5,000)+ci13(5,000)=14,000만원(갱신 포함). 권장 5,000만원 대비 충분하나 갱신형 다수 포함.</a:t>
-            </a:r>
-          </a:p>
-          <a:p>
-            <a:r>
-              <a:t>● [심장 담보 분류] 분석지에서 '허혈성심장질환진단비'와 '급성심근경색진단비' 별도 기재. let:smile 4060(ci6)의 '허혈성심장(1,000만)' → 허혈성심장질환진단비 분류. '심장질환수술비(900만)' 확인.</a:t>
-            </a:r>
-          </a:p>
-          <a:p>
-            <a:r>
-              <a:t>● [DB생명 2510 종신 사망담보] 생보 종신보험이므로 사망=일반사망(종신). 분석지에서 사망보험금 2,000만원 확인.</a:t>
-            </a:r>
-          </a:p>
-          <a:p>
-            <a:r>
-              <a:t>● [DB 여행자보험 별도계약] 25페이지에 DB 여행자보험(2022.09.17~2022.09.18, 보험료0원) 계약 1건이 있으나 이미 종료된 단기 여행자보험으로 보유계약 목록에서 제외(만료된 계약).</a:t>
-            </a:r>
-          </a:p>
-          <a:p>
-            <a:r>
-              <a:t>● [let:smile 4060 갱신형 후유장해] '(3~100%)(갱신형)' 후유장해 담보가 별도 존재. renew:true 처리. 비갱신 후유장해와 분리.</a:t>
-            </a:r>
-          </a:p>
-          <a:p>
-            <a:r>
-              <a:t>● [수술비 1-5종] KB 5.10.10 1~5종 질병수술비(1종20/2종50/3종200/4종500/5종500), 상해수술비(1종20/2종50/3종200/4종500/5종1000). 법칙에 따라 종별 최대값=5종 질병500만, 5종 상해1,000만 택1. DB 2510 1-5종(1종20/2종50/3종100/4종200/5종1000)=5종 1,000만. Super s0904 5종30만.</a:t>
-            </a:r>
-          </a:p>
-          <a:p>
-            <a:r>
-              <a:t>● [약관확인 필요] DB생명 2510: 주계약 사망보험금 2,000만원인데 체증형 가능성 있음(상품명 2510에서 '25년 10월' 출시 추정). 정확한 주계약 구성 및 체증 여부 증권 확인 요망.</a:t>
-            </a:r>
-          </a:p>
-          <a:p>
-            <a:r>
-              <a:t>● [약관확인 필요] let:smile 4060 2604: 뇌혈관계통수술비(1,000만), 심장질환수술비(900만) — 수술 범위 및 지급기준(1-5종 vs 별도 정의) 약관 확인 요망.</a:t>
-            </a:r>
-          </a:p>
-          <a:p>
-            <a:r>
-              <a:t>● [실손 현황] Super s0904(1세대 실손, 가입2009.07) 외 별도 실손 미가입 확인. 4세대 실손 신규 가입 권장.</a:t>
+              <a:t>보장분석 메모</a:t>
             </a:r>
           </a:p>
         </p:txBody>
